--- a/WEEK-3-SQL/SQL_postgres (2).pptx
+++ b/WEEK-3-SQL/SQL_postgres (2).pptx
@@ -454,7 +454,7 @@
             <a:fld id="{B61BEF0D-F0BB-DE4B-95CE-6DB70DBA9567}" type="datetimeFigureOut">
               <a:rPr lang="en-US" dirty="0"/>
               <a:pPr/>
-              <a:t>9/10/26</a:t>
+              <a:t>9/17/26</a:t>
             </a:fld>
             <a:endParaRPr lang="en-US" dirty="0"/>
           </a:p>
@@ -716,7 +716,7 @@
             <a:fld id="{B61BEF0D-F0BB-DE4B-95CE-6DB70DBA9567}" type="datetimeFigureOut">
               <a:rPr lang="en-US" dirty="0"/>
               <a:pPr/>
-              <a:t>9/10/26</a:t>
+              <a:t>9/17/26</a:t>
             </a:fld>
             <a:endParaRPr lang="en-US" dirty="0"/>
           </a:p>
@@ -951,7 +951,7 @@
             <a:fld id="{B61BEF0D-F0BB-DE4B-95CE-6DB70DBA9567}" type="datetimeFigureOut">
               <a:rPr lang="en-US" dirty="0"/>
               <a:pPr/>
-              <a:t>9/10/26</a:t>
+              <a:t>9/17/26</a:t>
             </a:fld>
             <a:endParaRPr lang="en-US" dirty="0"/>
           </a:p>
@@ -1198,7 +1198,7 @@
             <a:fld id="{B61BEF0D-F0BB-DE4B-95CE-6DB70DBA9567}" type="datetimeFigureOut">
               <a:rPr lang="en-US" dirty="0"/>
               <a:pPr/>
-              <a:t>9/10/26</a:t>
+              <a:t>9/17/26</a:t>
             </a:fld>
             <a:endParaRPr lang="en-US" dirty="0"/>
           </a:p>
@@ -1506,7 +1506,7 @@
             <a:fld id="{B61BEF0D-F0BB-DE4B-95CE-6DB70DBA9567}" type="datetimeFigureOut">
               <a:rPr lang="en-US" dirty="0"/>
               <a:pPr/>
-              <a:t>9/10/26</a:t>
+              <a:t>9/17/26</a:t>
             </a:fld>
             <a:endParaRPr lang="en-US" dirty="0"/>
           </a:p>
@@ -1807,7 +1807,7 @@
             <a:fld id="{B61BEF0D-F0BB-DE4B-95CE-6DB70DBA9567}" type="datetimeFigureOut">
               <a:rPr lang="en-US" dirty="0"/>
               <a:pPr/>
-              <a:t>9/10/26</a:t>
+              <a:t>9/17/26</a:t>
             </a:fld>
             <a:endParaRPr lang="en-US" dirty="0"/>
           </a:p>
@@ -2228,7 +2228,7 @@
             <a:fld id="{B61BEF0D-F0BB-DE4B-95CE-6DB70DBA9567}" type="datetimeFigureOut">
               <a:rPr lang="en-US" dirty="0"/>
               <a:pPr/>
-              <a:t>9/10/26</a:t>
+              <a:t>9/17/26</a:t>
             </a:fld>
             <a:endParaRPr lang="en-US" dirty="0"/>
           </a:p>
@@ -2391,7 +2391,7 @@
             <a:fld id="{B61BEF0D-F0BB-DE4B-95CE-6DB70DBA9567}" type="datetimeFigureOut">
               <a:rPr lang="en-US" dirty="0"/>
               <a:pPr/>
-              <a:t>9/10/26</a:t>
+              <a:t>9/17/26</a:t>
             </a:fld>
             <a:endParaRPr lang="en-US" dirty="0"/>
           </a:p>
@@ -2488,7 +2488,7 @@
             <a:fld id="{B61BEF0D-F0BB-DE4B-95CE-6DB70DBA9567}" type="datetimeFigureOut">
               <a:rPr lang="en-US" dirty="0"/>
               <a:pPr/>
-              <a:t>9/10/26</a:t>
+              <a:t>9/17/26</a:t>
             </a:fld>
             <a:endParaRPr lang="en-US" dirty="0"/>
           </a:p>
@@ -2866,7 +2866,7 @@
             <a:fld id="{B61BEF0D-F0BB-DE4B-95CE-6DB70DBA9567}" type="datetimeFigureOut">
               <a:rPr lang="en-US" dirty="0"/>
               <a:pPr/>
-              <a:t>9/10/26</a:t>
+              <a:t>9/17/26</a:t>
             </a:fld>
             <a:endParaRPr lang="en-US" dirty="0"/>
           </a:p>
@@ -3152,7 +3152,7 @@
             <a:fld id="{B61BEF0D-F0BB-DE4B-95CE-6DB70DBA9567}" type="datetimeFigureOut">
               <a:rPr lang="en-US" dirty="0"/>
               <a:pPr/>
-              <a:t>9/10/26</a:t>
+              <a:t>9/17/26</a:t>
             </a:fld>
             <a:endParaRPr lang="en-US" dirty="0"/>
           </a:p>
@@ -3391,7 +3391,7 @@
             <a:fld id="{B61BEF0D-F0BB-DE4B-95CE-6DB70DBA9567}" type="datetimeFigureOut">
               <a:rPr lang="en-US" dirty="0"/>
               <a:pPr/>
-              <a:t>9/10/26</a:t>
+              <a:t>9/17/26</a:t>
             </a:fld>
             <a:endParaRPr lang="en-US" dirty="0"/>
           </a:p>
@@ -15477,7 +15477,7 @@
                         <a:buNone/>
                       </a:pPr>
                       <a:r>
-                        <a:rPr lang="en-US"/>
+                        <a:rPr lang="en-US" dirty="0"/>
                         <a:t>BIGSERIAL</a:t>
                       </a:r>
                     </a:p>
@@ -15507,7 +15507,7 @@
                         <a:buNone/>
                       </a:pPr>
                       <a:r>
-                        <a:rPr lang="en-US"/>
+                        <a:rPr lang="en-US" dirty="0"/>
                         <a:t>8B</a:t>
                       </a:r>
                     </a:p>
@@ -17798,7 +17798,7 @@
               </a:spcBef>
             </a:pPr>
             <a:r>
-              <a:rPr lang="en-US" sz="2000">
+              <a:rPr lang="en-US" sz="2000" dirty="0">
                 <a:solidFill>
                   <a:schemeClr val="tx1"/>
                 </a:solidFill>
@@ -17813,7 +17813,7 @@
               </a:spcBef>
             </a:pPr>
             <a:r>
-              <a:rPr lang="en-US" sz="2000">
+              <a:rPr lang="en-US" sz="2000" dirty="0">
                 <a:solidFill>
                   <a:schemeClr val="tx1"/>
                 </a:solidFill>
@@ -17828,12 +17828,28 @@
               </a:spcBef>
             </a:pPr>
             <a:r>
-              <a:rPr lang="en-US" sz="2000">
+              <a:rPr lang="en-US" sz="2000" dirty="0">
                 <a:solidFill>
                   <a:schemeClr val="tx1"/>
                 </a:solidFill>
               </a:rPr>
-              <a:t>    order_id UUID PRIMARY KEY,</a:t>
+              <a:t>    </a:t>
+            </a:r>
+            <a:r>
+              <a:rPr lang="en-US" sz="2000" dirty="0" err="1">
+                <a:solidFill>
+                  <a:schemeClr val="tx1"/>
+                </a:solidFill>
+              </a:rPr>
+              <a:t>order_id</a:t>
+            </a:r>
+            <a:r>
+              <a:rPr lang="en-US" sz="2000" dirty="0">
+                <a:solidFill>
+                  <a:schemeClr val="tx1"/>
+                </a:solidFill>
+              </a:rPr>
+              <a:t> UUID PRIMARY KEY,</a:t>
             </a:r>
           </a:p>
           <a:p>
@@ -17843,12 +17859,44 @@
               </a:spcBef>
             </a:pPr>
             <a:r>
-              <a:rPr lang="en-US" sz="2000">
+              <a:rPr lang="en-US" sz="2000" dirty="0">
                 <a:solidFill>
                   <a:schemeClr val="tx1"/>
                 </a:solidFill>
               </a:rPr>
-              <a:t>    user_id UUID NOT NULL REFERENCES users(user_id)</a:t>
+              <a:t>    </a:t>
+            </a:r>
+            <a:r>
+              <a:rPr lang="en-US" sz="2000" dirty="0" err="1">
+                <a:solidFill>
+                  <a:schemeClr val="tx1"/>
+                </a:solidFill>
+              </a:rPr>
+              <a:t>user_id</a:t>
+            </a:r>
+            <a:r>
+              <a:rPr lang="en-US" sz="2000" dirty="0">
+                <a:solidFill>
+                  <a:schemeClr val="tx1"/>
+                </a:solidFill>
+              </a:rPr>
+              <a:t> UUID NOT NULL REFERENCES users(</a:t>
+            </a:r>
+            <a:r>
+              <a:rPr lang="en-US" sz="2000" dirty="0" err="1">
+                <a:solidFill>
+                  <a:schemeClr val="tx1"/>
+                </a:solidFill>
+              </a:rPr>
+              <a:t>user_id</a:t>
+            </a:r>
+            <a:r>
+              <a:rPr lang="en-US" sz="2000" dirty="0">
+                <a:solidFill>
+                  <a:schemeClr val="tx1"/>
+                </a:solidFill>
+              </a:rPr>
+              <a:t>)</a:t>
             </a:r>
           </a:p>
           <a:p>
@@ -17858,7 +17906,7 @@
               </a:spcBef>
             </a:pPr>
             <a:r>
-              <a:rPr lang="en-US" sz="2000">
+              <a:rPr lang="en-US" sz="2000" dirty="0">
                 <a:solidFill>
                   <a:schemeClr val="tx1"/>
                 </a:solidFill>
@@ -17873,7 +17921,7 @@
               </a:spcBef>
             </a:pPr>
             <a:r>
-              <a:rPr lang="en-US" sz="2000">
+              <a:rPr lang="en-US" sz="2000" dirty="0">
                 <a:solidFill>
                   <a:schemeClr val="tx1"/>
                 </a:solidFill>
@@ -17888,7 +17936,7 @@
               </a:spcBef>
             </a:pPr>
             <a:r>
-              <a:rPr lang="en-US" sz="2000">
+              <a:rPr lang="en-US" sz="2000" dirty="0">
                 <a:solidFill>
                   <a:schemeClr val="tx1"/>
                 </a:solidFill>
@@ -17903,12 +17951,28 @@
               </a:spcBef>
             </a:pPr>
             <a:r>
-              <a:rPr lang="en-US" sz="2000">
+              <a:rPr lang="en-US" sz="2000" dirty="0">
                 <a:solidFill>
                   <a:schemeClr val="tx1"/>
                 </a:solidFill>
               </a:rPr>
-              <a:t>    order_id UUID PRIMARY KEY,</a:t>
+              <a:t>    </a:t>
+            </a:r>
+            <a:r>
+              <a:rPr lang="en-US" sz="2000" dirty="0" err="1">
+                <a:solidFill>
+                  <a:schemeClr val="tx1"/>
+                </a:solidFill>
+              </a:rPr>
+              <a:t>order_id</a:t>
+            </a:r>
+            <a:r>
+              <a:rPr lang="en-US" sz="2000" dirty="0">
+                <a:solidFill>
+                  <a:schemeClr val="tx1"/>
+                </a:solidFill>
+              </a:rPr>
+              <a:t> UUID PRIMARY KEY,</a:t>
             </a:r>
           </a:p>
           <a:p>
@@ -17918,12 +17982,28 @@
               </a:spcBef>
             </a:pPr>
             <a:r>
-              <a:rPr lang="en-US" sz="2000">
+              <a:rPr lang="en-US" sz="2000" dirty="0">
                 <a:solidFill>
                   <a:schemeClr val="tx1"/>
                 </a:solidFill>
               </a:rPr>
-              <a:t>    user_id UUID,</a:t>
+              <a:t>    </a:t>
+            </a:r>
+            <a:r>
+              <a:rPr lang="en-US" sz="2000" dirty="0" err="1">
+                <a:solidFill>
+                  <a:schemeClr val="tx1"/>
+                </a:solidFill>
+              </a:rPr>
+              <a:t>user_id</a:t>
+            </a:r>
+            <a:r>
+              <a:rPr lang="en-US" sz="2000" dirty="0">
+                <a:solidFill>
+                  <a:schemeClr val="tx1"/>
+                </a:solidFill>
+              </a:rPr>
+              <a:t> UUID,</a:t>
             </a:r>
           </a:p>
           <a:p>
@@ -17933,12 +18013,28 @@
               </a:spcBef>
             </a:pPr>
             <a:r>
-              <a:rPr lang="en-US" sz="2000">
+              <a:rPr lang="en-US" sz="2000" dirty="0">
                 <a:solidFill>
                   <a:schemeClr val="tx1"/>
                 </a:solidFill>
               </a:rPr>
-              <a:t>    FOREIGN KEY (user_id)</a:t>
+              <a:t>    FOREIGN KEY (</a:t>
+            </a:r>
+            <a:r>
+              <a:rPr lang="en-US" sz="2000" dirty="0" err="1">
+                <a:solidFill>
+                  <a:schemeClr val="tx1"/>
+                </a:solidFill>
+              </a:rPr>
+              <a:t>user_id</a:t>
+            </a:r>
+            <a:r>
+              <a:rPr lang="en-US" sz="2000" dirty="0">
+                <a:solidFill>
+                  <a:schemeClr val="tx1"/>
+                </a:solidFill>
+              </a:rPr>
+              <a:t>)</a:t>
             </a:r>
           </a:p>
           <a:p>
@@ -17948,12 +18044,28 @@
               </a:spcBef>
             </a:pPr>
             <a:r>
-              <a:rPr lang="en-US" sz="2000">
+              <a:rPr lang="en-US" sz="2000" dirty="0">
                 <a:solidFill>
                   <a:schemeClr val="tx1"/>
                 </a:solidFill>
               </a:rPr>
-              <a:t>        REFERENCES users(user_id)</a:t>
+              <a:t>        REFERENCES users(</a:t>
+            </a:r>
+            <a:r>
+              <a:rPr lang="en-US" sz="2000" dirty="0" err="1">
+                <a:solidFill>
+                  <a:schemeClr val="tx1"/>
+                </a:solidFill>
+              </a:rPr>
+              <a:t>user_id</a:t>
+            </a:r>
+            <a:r>
+              <a:rPr lang="en-US" sz="2000" dirty="0">
+                <a:solidFill>
+                  <a:schemeClr val="tx1"/>
+                </a:solidFill>
+              </a:rPr>
+              <a:t>)</a:t>
             </a:r>
           </a:p>
           <a:p>
@@ -17963,7 +18075,7 @@
               </a:spcBef>
             </a:pPr>
             <a:r>
-              <a:rPr lang="en-US" sz="2000">
+              <a:rPr lang="en-US" sz="2000" dirty="0">
                 <a:solidFill>
                   <a:schemeClr val="tx1"/>
                 </a:solidFill>
@@ -17978,7 +18090,7 @@
               </a:spcBef>
             </a:pPr>
             <a:r>
-              <a:rPr lang="en-US" sz="2000">
+              <a:rPr lang="en-US" sz="2000" dirty="0">
                 <a:solidFill>
                   <a:schemeClr val="tx1"/>
                 </a:solidFill>
@@ -18014,7 +18126,7 @@
         </p:nvSpPr>
         <p:spPr>
           <a:xfrm>
-            <a:off x="6296811" y="5348283"/>
+            <a:off x="5965341" y="4719633"/>
             <a:ext cx="3433313" cy="923330"/>
           </a:xfrm>
           <a:prstGeom prst="rect">
